--- a/Documentation/Prezentation/Проект_ускорения_внедрения_нового_продукта.pptx
+++ b/Documentation/Prezentation/Проект_ускорения_внедрения_нового_продукта.pptx
@@ -225,7 +225,7 @@
           <a:p>
             <a:fld id="{96E0D1DC-01EA-4F6B-B539-3DBC5DE2A3B2}" type="datetimeFigureOut">
               <a:rPr lang="ru-RU" smtClean="0"/>
-              <a:t>01.09.2026</a:t>
+              <a:t>03.09.2026</a:t>
             </a:fld>
             <a:endParaRPr lang="ru-RU"/>
           </a:p>
@@ -775,7 +775,7 @@
           <a:p>
             <a:fld id="{5BCAD085-E8A6-8845-BD4E-CB4CCA059FC4}" type="datetimeFigureOut">
               <a:rPr lang="en-US" smtClean="0"/>
-              <a:t>9/1/2026</a:t>
+              <a:t>9/3/2026</a:t>
             </a:fld>
             <a:endParaRPr lang="en-US"/>
           </a:p>
@@ -943,7 +943,7 @@
           <a:p>
             <a:fld id="{5BCAD085-E8A6-8845-BD4E-CB4CCA059FC4}" type="datetimeFigureOut">
               <a:rPr lang="en-US" smtClean="0"/>
-              <a:t>9/1/2026</a:t>
+              <a:t>9/3/2026</a:t>
             </a:fld>
             <a:endParaRPr lang="en-US"/>
           </a:p>
@@ -1121,7 +1121,7 @@
           <a:p>
             <a:fld id="{5BCAD085-E8A6-8845-BD4E-CB4CCA059FC4}" type="datetimeFigureOut">
               <a:rPr lang="en-US" smtClean="0"/>
-              <a:t>9/1/2026</a:t>
+              <a:t>9/3/2026</a:t>
             </a:fld>
             <a:endParaRPr lang="en-US"/>
           </a:p>
@@ -4980,7 +4980,7 @@
           <a:p>
             <a:fld id="{5BCAD085-E8A6-8845-BD4E-CB4CCA059FC4}" type="datetimeFigureOut">
               <a:rPr lang="en-US" smtClean="0"/>
-              <a:t>9/1/2026</a:t>
+              <a:t>9/3/2026</a:t>
             </a:fld>
             <a:endParaRPr lang="en-US"/>
           </a:p>
@@ -7429,7 +7429,7 @@
           <a:p>
             <a:fld id="{5BCAD085-E8A6-8845-BD4E-CB4CCA059FC4}" type="datetimeFigureOut">
               <a:rPr lang="en-US" smtClean="0"/>
-              <a:t>9/1/2026</a:t>
+              <a:t>9/3/2026</a:t>
             </a:fld>
             <a:endParaRPr lang="en-US"/>
           </a:p>
@@ -7714,7 +7714,7 @@
           <a:p>
             <a:fld id="{5BCAD085-E8A6-8845-BD4E-CB4CCA059FC4}" type="datetimeFigureOut">
               <a:rPr lang="en-US" smtClean="0"/>
-              <a:t>9/1/2026</a:t>
+              <a:t>9/3/2026</a:t>
             </a:fld>
             <a:endParaRPr lang="en-US"/>
           </a:p>
@@ -8133,7 +8133,7 @@
           <a:p>
             <a:fld id="{5BCAD085-E8A6-8845-BD4E-CB4CCA059FC4}" type="datetimeFigureOut">
               <a:rPr lang="en-US" smtClean="0"/>
-              <a:t>9/1/2026</a:t>
+              <a:t>9/3/2026</a:t>
             </a:fld>
             <a:endParaRPr lang="en-US"/>
           </a:p>
@@ -8250,7 +8250,7 @@
           <a:p>
             <a:fld id="{5BCAD085-E8A6-8845-BD4E-CB4CCA059FC4}" type="datetimeFigureOut">
               <a:rPr lang="en-US" smtClean="0"/>
-              <a:t>9/1/2026</a:t>
+              <a:t>9/3/2026</a:t>
             </a:fld>
             <a:endParaRPr lang="en-US"/>
           </a:p>
@@ -8345,7 +8345,7 @@
           <a:p>
             <a:fld id="{5BCAD085-E8A6-8845-BD4E-CB4CCA059FC4}" type="datetimeFigureOut">
               <a:rPr lang="en-US" smtClean="0"/>
-              <a:t>9/1/2026</a:t>
+              <a:t>9/3/2026</a:t>
             </a:fld>
             <a:endParaRPr lang="en-US"/>
           </a:p>
@@ -8620,7 +8620,7 @@
           <a:p>
             <a:fld id="{5BCAD085-E8A6-8845-BD4E-CB4CCA059FC4}" type="datetimeFigureOut">
               <a:rPr lang="en-US" smtClean="0"/>
-              <a:t>9/1/2026</a:t>
+              <a:t>9/3/2026</a:t>
             </a:fld>
             <a:endParaRPr lang="en-US"/>
           </a:p>
@@ -8872,7 +8872,7 @@
           <a:p>
             <a:fld id="{5BCAD085-E8A6-8845-BD4E-CB4CCA059FC4}" type="datetimeFigureOut">
               <a:rPr lang="en-US" smtClean="0"/>
-              <a:t>9/1/2026</a:t>
+              <a:t>9/3/2026</a:t>
             </a:fld>
             <a:endParaRPr lang="en-US"/>
           </a:p>
@@ -9083,7 +9083,7 @@
           <a:p>
             <a:fld id="{5BCAD085-E8A6-8845-BD4E-CB4CCA059FC4}" type="datetimeFigureOut">
               <a:rPr lang="en-US" smtClean="0"/>
-              <a:t>9/1/2026</a:t>
+              <a:t>9/3/2026</a:t>
             </a:fld>
             <a:endParaRPr lang="en-US"/>
           </a:p>
@@ -16511,7 +16511,7 @@
         <p:spPr>
           <a:xfrm>
             <a:off x="548640" y="1051560"/>
-            <a:ext cx="11064240" cy="1654299"/>
+            <a:ext cx="11064240" cy="1349087"/>
           </a:xfrm>
           <a:prstGeom prst="rect">
             <a:avLst/>
@@ -16659,6 +16659,10 @@
               <a:t> </a:t>
             </a:r>
             <a:r>
+              <a:rPr lang="en-US" dirty="0"/>
+              <a:t>MVP </a:t>
+            </a:r>
+            <a:r>
               <a:rPr dirty="0" err="1"/>
               <a:t>пилота</a:t>
             </a:r>
@@ -16709,106 +16713,6 @@
             <a:r>
               <a:rPr dirty="0" err="1"/>
               <a:t>автоматизация</a:t>
-            </a:r>
-            <a:r>
-              <a:rPr dirty="0"/>
-              <a:t>.</a:t>
-            </a:r>
-          </a:p>
-          <a:p>
-            <a:pPr>
-              <a:spcAft>
-                <a:spcPts val="700"/>
-              </a:spcAft>
-              <a:defRPr sz="1400">
-                <a:solidFill>
-                  <a:srgbClr val="141414"/>
-                </a:solidFill>
-              </a:defRPr>
-            </a:pPr>
-            <a:r>
-              <a:rPr dirty="0" err="1"/>
-              <a:t>Ниже</a:t>
-            </a:r>
-            <a:r>
-              <a:rPr dirty="0"/>
-              <a:t> — </a:t>
-            </a:r>
-            <a:r>
-              <a:rPr dirty="0" err="1"/>
-              <a:t>иллюстративная</a:t>
-            </a:r>
-            <a:r>
-              <a:rPr dirty="0"/>
-              <a:t> </a:t>
-            </a:r>
-            <a:r>
-              <a:rPr dirty="0" err="1"/>
-              <a:t>бизнес-модель</a:t>
-            </a:r>
-            <a:r>
-              <a:rPr dirty="0"/>
-              <a:t> </a:t>
-            </a:r>
-            <a:r>
-              <a:rPr dirty="0" err="1"/>
-              <a:t>для</a:t>
-            </a:r>
-            <a:r>
-              <a:rPr dirty="0"/>
-              <a:t> </a:t>
-            </a:r>
-            <a:r>
-              <a:rPr dirty="0" err="1"/>
-              <a:t>защиты</a:t>
-            </a:r>
-            <a:r>
-              <a:rPr dirty="0"/>
-              <a:t>; </a:t>
-            </a:r>
-            <a:r>
-              <a:rPr dirty="0" err="1"/>
-              <a:t>фактические</a:t>
-            </a:r>
-            <a:r>
-              <a:rPr dirty="0"/>
-              <a:t> </a:t>
-            </a:r>
-            <a:r>
-              <a:rPr dirty="0" err="1"/>
-              <a:t>значения</a:t>
-            </a:r>
-            <a:r>
-              <a:rPr dirty="0"/>
-              <a:t> </a:t>
-            </a:r>
-            <a:r>
-              <a:rPr dirty="0" err="1"/>
-              <a:t>нужно</a:t>
-            </a:r>
-            <a:r>
-              <a:rPr dirty="0"/>
-              <a:t> </a:t>
-            </a:r>
-            <a:r>
-              <a:rPr dirty="0" err="1"/>
-              <a:t>заменить</a:t>
-            </a:r>
-            <a:r>
-              <a:rPr dirty="0"/>
-              <a:t> </a:t>
-            </a:r>
-            <a:r>
-              <a:rPr dirty="0" err="1"/>
-              <a:t>данными</a:t>
-            </a:r>
-            <a:r>
-              <a:rPr dirty="0"/>
-              <a:t> </a:t>
-            </a:r>
-            <a:r>
-              <a:rPr dirty="0" err="1"/>
-              <a:t>компании</a:t>
             </a:r>
             <a:r>
               <a:rPr dirty="0"/>
@@ -16826,7 +16730,7 @@
           <p:nvPr>
             <p:extLst>
               <p:ext uri="{D42A27DB-BD31-4B8C-83A1-F6EECF244321}">
-                <p14:modId xmlns:p14="http://schemas.microsoft.com/office/powerpoint/2010/main" val="1664074446"/>
+                <p14:modId xmlns:p14="http://schemas.microsoft.com/office/powerpoint/2010/main" val="2679574048"/>
               </p:ext>
             </p:extLst>
           </p:nvPr>
@@ -17225,8 +17129,30 @@
                         </a:defRPr>
                       </a:pPr>
                       <a:r>
-                        <a:t>Стоимость проекта/автоматизации</a:t>
+                        <a:rPr dirty="0" err="1"/>
+                        <a:t>Стоимость</a:t>
                       </a:r>
+                      <a:r>
+                        <a:rPr dirty="0"/>
+                        <a:t> </a:t>
+                      </a:r>
+                      <a:r>
+                        <a:rPr lang="en-US" dirty="0"/>
+                        <a:t>MVP </a:t>
+                      </a:r>
+                      <a:r>
+                        <a:rPr dirty="0" err="1"/>
+                        <a:t>проекта</a:t>
+                      </a:r>
+                      <a:r>
+                        <a:rPr dirty="0"/>
+                        <a:t>/</a:t>
+                      </a:r>
+                      <a:r>
+                        <a:rPr dirty="0" err="1"/>
+                        <a:t>автоматизации</a:t>
+                      </a:r>
+                      <a:endParaRPr dirty="0"/>
                     </a:p>
                   </a:txBody>
                   <a:tcPr marL="45720" marR="45720" marT="27432" marB="27432">
@@ -17496,7 +17422,11 @@
             </a:r>
             <a:r>
               <a:rPr dirty="0" err="1"/>
-              <a:t>дополнительной</a:t>
+              <a:t>дополнительно</a:t>
+            </a:r>
+            <a:r>
+              <a:rPr lang="ru-RU" dirty="0"/>
+              <a:t>го</a:t>
             </a:r>
             <a:r>
               <a:rPr dirty="0"/>
@@ -17504,15 +17434,19 @@
             </a:r>
             <a:r>
               <a:rPr dirty="0" err="1"/>
-              <a:t>маржинальной</a:t>
+              <a:t>маржинально</a:t>
+            </a:r>
+            <a:r>
+              <a:rPr lang="ru-RU" dirty="0"/>
+              <a:t>го</a:t>
             </a:r>
             <a:r>
               <a:rPr dirty="0"/>
               <a:t> </a:t>
             </a:r>
             <a:r>
-              <a:rPr dirty="0" err="1"/>
-              <a:t>прибыли</a:t>
+              <a:rPr lang="ru-RU" dirty="0"/>
+              <a:t>вклада</a:t>
             </a:r>
             <a:r>
               <a:rPr dirty="0"/>
@@ -17549,6 +17483,14 @@
             <a:r>
               <a:rPr dirty="0" err="1"/>
               <a:t>стоимости</a:t>
+            </a:r>
+            <a:r>
+              <a:rPr lang="ru-RU" dirty="0"/>
+              <a:t> </a:t>
+            </a:r>
+            <a:r>
+              <a:rPr lang="en-US" dirty="0"/>
+              <a:t>MVP</a:t>
             </a:r>
             <a:r>
               <a:rPr dirty="0"/>
@@ -17879,6 +17821,10 @@
               <a:t> </a:t>
             </a:r>
             <a:r>
+              <a:rPr lang="en-US" dirty="0"/>
+              <a:t>MVP </a:t>
+            </a:r>
+            <a:r>
               <a:rPr dirty="0" err="1"/>
               <a:t>проекта</a:t>
             </a:r>
@@ -18724,7 +18670,7 @@
         <p:spPr>
           <a:xfrm>
             <a:off x="731520" y="1234440"/>
-            <a:ext cx="10698480" cy="2372444"/>
+            <a:ext cx="10698480" cy="2634054"/>
           </a:xfrm>
           <a:prstGeom prst="rect">
             <a:avLst/>
@@ -19176,60 +19122,12 @@
               </a:defRPr>
             </a:pPr>
             <a:r>
-              <a:rPr dirty="0" err="1"/>
-              <a:t>После</a:t>
-            </a:r>
-            <a:r>
-              <a:rPr dirty="0"/>
-              <a:t> </a:t>
-            </a:r>
-            <a:r>
-              <a:rPr dirty="0" err="1"/>
-              <a:t>пилота</a:t>
-            </a:r>
-            <a:r>
-              <a:rPr dirty="0"/>
-              <a:t> — </a:t>
-            </a:r>
-            <a:r>
-              <a:rPr dirty="0" err="1"/>
-              <a:t>масштабировать</a:t>
-            </a:r>
-            <a:r>
-              <a:rPr dirty="0"/>
-              <a:t> </a:t>
-            </a:r>
-            <a:r>
-              <a:rPr dirty="0" err="1"/>
-              <a:t>процесс</a:t>
-            </a:r>
-            <a:r>
-              <a:rPr dirty="0"/>
-              <a:t> </a:t>
-            </a:r>
-            <a:r>
-              <a:rPr dirty="0" err="1"/>
-              <a:t>на</a:t>
-            </a:r>
-            <a:r>
-              <a:rPr dirty="0"/>
-              <a:t> </a:t>
-            </a:r>
-            <a:r>
-              <a:rPr dirty="0" err="1"/>
-              <a:t>всю</a:t>
-            </a:r>
-            <a:r>
-              <a:rPr dirty="0"/>
-              <a:t> </a:t>
-            </a:r>
-            <a:r>
-              <a:rPr dirty="0" err="1"/>
-              <a:t>сеть</a:t>
-            </a:r>
-            <a:r>
-              <a:rPr dirty="0"/>
-              <a:t>.</a:t>
+              <a:rPr lang="ru-RU"/>
+              <a:t>После успешного </a:t>
+            </a:r>
+            <a:r>
+              <a:rPr lang="ru-RU" dirty="0"/>
+              <a:t>пилота — реализовать целевую архитектуру с построением полноценной интеграционной платформы и масштабировать процесс на всю сеть.</a:t>
             </a:r>
           </a:p>
         </p:txBody>
@@ -21112,8 +21010,50 @@
               </a:defRPr>
             </a:pPr>
             <a:r>
-              <a:t>Одна Kanban-доска от идеи до запуска</a:t>
-            </a:r>
+              <a:rPr dirty="0" err="1"/>
+              <a:t>Одна</a:t>
+            </a:r>
+            <a:r>
+              <a:rPr dirty="0"/>
+              <a:t> Kanban-</a:t>
+            </a:r>
+            <a:r>
+              <a:rPr dirty="0" err="1"/>
+              <a:t>доска</a:t>
+            </a:r>
+            <a:r>
+              <a:rPr dirty="0"/>
+              <a:t> </a:t>
+            </a:r>
+            <a:r>
+              <a:rPr dirty="0" err="1"/>
+              <a:t>от</a:t>
+            </a:r>
+            <a:r>
+              <a:rPr dirty="0"/>
+              <a:t> </a:t>
+            </a:r>
+            <a:r>
+              <a:rPr dirty="0" err="1"/>
+              <a:t>идеи</a:t>
+            </a:r>
+            <a:r>
+              <a:rPr dirty="0"/>
+              <a:t> </a:t>
+            </a:r>
+            <a:r>
+              <a:rPr dirty="0" err="1"/>
+              <a:t>до</a:t>
+            </a:r>
+            <a:r>
+              <a:rPr dirty="0"/>
+              <a:t> </a:t>
+            </a:r>
+            <a:r>
+              <a:rPr dirty="0" err="1"/>
+              <a:t>запуска</a:t>
+            </a:r>
+            <a:endParaRPr dirty="0"/>
           </a:p>
         </p:txBody>
       </p:sp>
@@ -21366,8 +21306,14 @@
               </a:defRPr>
             </a:pPr>
             <a:r>
-              <a:t>WIP-лимиты</a:t>
-            </a:r>
+              <a:rPr dirty="0"/>
+              <a:t>WIP-</a:t>
+            </a:r>
+            <a:r>
+              <a:rPr dirty="0" err="1"/>
+              <a:t>лимиты</a:t>
+            </a:r>
+            <a:endParaRPr dirty="0"/>
           </a:p>
         </p:txBody>
       </p:sp>
@@ -30237,8 +30183,8 @@
         </p:nvSpPr>
         <p:spPr>
           <a:xfrm>
-            <a:off x="5157216" y="2514600"/>
-            <a:ext cx="2157984" cy="292608"/>
+            <a:off x="5157216" y="2496312"/>
+            <a:ext cx="3072384" cy="310896"/>
           </a:xfrm>
           <a:prstGeom prst="roundRect">
             <a:avLst/>
@@ -30316,8 +30262,8 @@
         </p:nvSpPr>
         <p:spPr>
           <a:xfrm>
-            <a:off x="6035040" y="2935224"/>
-            <a:ext cx="2157984" cy="292608"/>
+            <a:off x="6035040" y="2907792"/>
+            <a:ext cx="2157984" cy="320040"/>
           </a:xfrm>
           <a:prstGeom prst="roundRect">
             <a:avLst/>
@@ -30396,7 +30342,7 @@
         <p:spPr>
           <a:xfrm>
             <a:off x="5596128" y="3355848"/>
-            <a:ext cx="2157984" cy="292608"/>
+            <a:ext cx="2596896" cy="320040"/>
           </a:xfrm>
           <a:prstGeom prst="roundRect">
             <a:avLst/>
@@ -30440,7 +30386,7 @@
         <p:spPr>
           <a:xfrm>
             <a:off x="411480" y="3758184"/>
-            <a:ext cx="3246120" cy="365760"/>
+            <a:ext cx="2920992" cy="246221"/>
           </a:xfrm>
           <a:prstGeom prst="rect">
             <a:avLst/>
@@ -30461,8 +30407,10 @@
               </a:defRPr>
             </a:pPr>
             <a:r>
-              <a:t>IT: анализ и декомпозиция</a:t>
-            </a:r>
+              <a:rPr lang="ru-RU" dirty="0"/>
+              <a:t>Проверка IT-данных и автоматических маршрутов</a:t>
+            </a:r>
+            <a:endParaRPr dirty="0"/>
           </a:p>
         </p:txBody>
       </p:sp>
@@ -30474,8 +30422,8 @@
         </p:nvSpPr>
         <p:spPr>
           <a:xfrm>
-            <a:off x="5157216" y="3776472"/>
-            <a:ext cx="1280160" cy="292608"/>
+            <a:off x="5157216" y="3758184"/>
+            <a:ext cx="2157984" cy="310896"/>
           </a:xfrm>
           <a:prstGeom prst="roundRect">
             <a:avLst/>
@@ -30512,14 +30460,14 @@
       </p:sp>
       <p:sp>
         <p:nvSpPr>
-          <p:cNvPr id="47" name="TextBox 46"/>
+          <p:cNvPr id="49" name="TextBox 48"/>
           <p:cNvSpPr txBox="1"/>
           <p:nvPr/>
         </p:nvSpPr>
         <p:spPr>
           <a:xfrm>
-            <a:off x="411480" y="4178808"/>
-            <a:ext cx="3246120" cy="365760"/>
+            <a:off x="425196" y="4187952"/>
+            <a:ext cx="1734770" cy="246221"/>
           </a:xfrm>
           <a:prstGeom prst="rect">
             <a:avLst/>
@@ -30540,87 +30488,18 @@
               </a:defRPr>
             </a:pPr>
             <a:r>
-              <a:t>IT: разработка и интеграции</a:t>
-            </a:r>
-          </a:p>
-        </p:txBody>
-      </p:sp>
-      <p:sp>
-        <p:nvSpPr>
-          <p:cNvPr id="48" name="Rounded Rectangle 47"/>
-          <p:cNvSpPr/>
-          <p:nvPr/>
-        </p:nvSpPr>
-        <p:spPr>
-          <a:xfrm>
-            <a:off x="6035040" y="4197096"/>
-            <a:ext cx="2596896" cy="292608"/>
-          </a:xfrm>
-          <a:prstGeom prst="roundRect">
-            <a:avLst/>
-          </a:prstGeom>
-          <a:solidFill>
-            <a:srgbClr val="ED7D31"/>
-          </a:solidFill>
-          <a:ln>
-            <a:noFill/>
-          </a:ln>
-        </p:spPr>
-        <p:style>
-          <a:lnRef idx="1">
-            <a:schemeClr val="accent1"/>
-          </a:lnRef>
-          <a:fillRef idx="3">
-            <a:schemeClr val="accent1"/>
-          </a:fillRef>
-          <a:effectRef idx="2">
-            <a:schemeClr val="accent1"/>
-          </a:effectRef>
-          <a:fontRef idx="minor">
-            <a:schemeClr val="lt1"/>
-          </a:fontRef>
-        </p:style>
-        <p:txBody>
-          <a:bodyPr rtlCol="0" anchor="ctr"/>
-          <a:lstStyle/>
-          <a:p>
-            <a:pPr algn="ctr"/>
-            <a:endParaRPr/>
-          </a:p>
-        </p:txBody>
-      </p:sp>
-      <p:sp>
-        <p:nvSpPr>
-          <p:cNvPr id="49" name="TextBox 48"/>
-          <p:cNvSpPr txBox="1"/>
-          <p:nvPr/>
-        </p:nvSpPr>
-        <p:spPr>
-          <a:xfrm>
-            <a:off x="411480" y="4599432"/>
-            <a:ext cx="3246120" cy="365760"/>
-          </a:xfrm>
-          <a:prstGeom prst="rect">
-            <a:avLst/>
-          </a:prstGeom>
-          <a:noFill/>
-        </p:spPr>
-        <p:txBody>
-          <a:bodyPr wrap="none">
-            <a:spAutoFit/>
-          </a:bodyPr>
-          <a:lstStyle/>
-          <a:p>
-            <a:pPr>
-              <a:defRPr sz="1000">
-                <a:solidFill>
-                  <a:srgbClr val="141414"/>
-                </a:solidFill>
-              </a:defRPr>
-            </a:pPr>
-            <a:r>
-              <a:t>Тестирование / BI / приемка</a:t>
-            </a:r>
+              <a:rPr lang="ru-RU" dirty="0"/>
+              <a:t>Тестирование</a:t>
+            </a:r>
+            <a:r>
+              <a:rPr dirty="0"/>
+              <a:t> / BI / </a:t>
+            </a:r>
+            <a:r>
+              <a:rPr lang="ru-RU" dirty="0"/>
+              <a:t>приемка</a:t>
+            </a:r>
+            <a:endParaRPr dirty="0"/>
           </a:p>
         </p:txBody>
       </p:sp>
@@ -30632,8 +30511,8 @@
         </p:nvSpPr>
         <p:spPr>
           <a:xfrm>
-            <a:off x="7790688" y="4617720"/>
-            <a:ext cx="1719072" cy="292608"/>
+            <a:off x="8229600" y="4151514"/>
+            <a:ext cx="1719072" cy="338328"/>
           </a:xfrm>
           <a:prstGeom prst="roundRect">
             <a:avLst/>
@@ -30676,8 +30555,8 @@
         </p:nvSpPr>
         <p:spPr>
           <a:xfrm>
-            <a:off x="411480" y="5020056"/>
-            <a:ext cx="3246120" cy="365760"/>
+            <a:off x="411480" y="4631436"/>
+            <a:ext cx="1314784" cy="246221"/>
           </a:xfrm>
           <a:prstGeom prst="rect">
             <a:avLst/>
@@ -30698,8 +30577,10 @@
               </a:defRPr>
             </a:pPr>
             <a:r>
+              <a:rPr lang="ru-RU" dirty="0"/>
               <a:t>Готовность к запуску</a:t>
             </a:r>
+            <a:endParaRPr dirty="0"/>
           </a:p>
         </p:txBody>
       </p:sp>
@@ -30711,7 +30592,7 @@
         </p:nvSpPr>
         <p:spPr>
           <a:xfrm>
-            <a:off x="9546336" y="5038344"/>
+            <a:off x="9546336" y="4663440"/>
             <a:ext cx="402336" cy="292608"/>
           </a:xfrm>
           <a:prstGeom prst="roundRect">
@@ -30755,8 +30636,8 @@
         </p:nvSpPr>
         <p:spPr>
           <a:xfrm>
-            <a:off x="411480" y="5440680"/>
-            <a:ext cx="3246120" cy="365760"/>
+            <a:off x="425196" y="5020056"/>
+            <a:ext cx="545342" cy="246221"/>
           </a:xfrm>
           <a:prstGeom prst="rect">
             <a:avLst/>
@@ -30777,8 +30658,10 @@
               </a:defRPr>
             </a:pPr>
             <a:r>
+              <a:rPr lang="ru-RU" dirty="0"/>
               <a:t>Запуск</a:t>
             </a:r>
+            <a:endParaRPr dirty="0"/>
           </a:p>
         </p:txBody>
       </p:sp>
@@ -30790,7 +30673,7 @@
         </p:nvSpPr>
         <p:spPr>
           <a:xfrm>
-            <a:off x="9985248" y="5458968"/>
+            <a:off x="9994392" y="5116985"/>
             <a:ext cx="402336" cy="292608"/>
           </a:xfrm>
           <a:prstGeom prst="roundRect">
